--- a/docs/Manufacturing-Performance-Analytics.pptx
+++ b/docs/Manufacturing-Performance-Analytics.pptx
@@ -1477,7 +1477,29 @@
                 <a:ea typeface="Lato" pitchFamily="34" charset="-122"/>
                 <a:cs typeface="Lato" pitchFamily="34" charset="-120"/>
               </a:rPr>
-              <a:t>Análise integrada de Produção, Qualidade, Manutenção e Asseguração da Qualidade com Machine Learning — numa fábrica simulada de embalagens plásticas.</a:t>
+              <a:t>Análise integrada de Produção, Qualidade, Manutenção e </a:t>
+            </a:r>
+            <a:r>
+              <a:rPr lang="en-US" sz="1100" dirty="0" err="1">
+                <a:solidFill>
+                  <a:srgbClr val="272525"/>
+                </a:solidFill>
+                <a:latin typeface="Lato" pitchFamily="34" charset="0"/>
+                <a:ea typeface="Lato" pitchFamily="34" charset="-122"/>
+                <a:cs typeface="Lato" pitchFamily="34" charset="-120"/>
+              </a:rPr>
+              <a:t>Asseguramento</a:t>
+            </a:r>
+            <a:r>
+              <a:rPr lang="en-US" sz="1100" dirty="0">
+                <a:solidFill>
+                  <a:srgbClr val="272525"/>
+                </a:solidFill>
+                <a:latin typeface="Lato" pitchFamily="34" charset="0"/>
+                <a:ea typeface="Lato" pitchFamily="34" charset="-122"/>
+                <a:cs typeface="Lato" pitchFamily="34" charset="-120"/>
+              </a:rPr>
+              <a:t> da Qualidade com Machine Learning — numa fábrica simulada de embalagens plásticas.</a:t>
             </a:r>
             <a:endParaRPr lang="en-US" sz="1100" dirty="0"/>
           </a:p>
@@ -1976,6 +1998,56 @@
           <a:p>
             <a:pPr algn="ctr"/>
             <a:endParaRPr lang="pt-PT"/>
+          </a:p>
+        </p:txBody>
+      </p:sp>
+      <p:sp>
+        <p:nvSpPr>
+          <p:cNvPr id="19" name="Text 1">
+            <a:extLst>
+              <a:ext uri="{FF2B5EF4-FFF2-40B4-BE49-F238E27FC236}">
+                <a16:creationId xmlns:a16="http://schemas.microsoft.com/office/drawing/2014/main" id="{ED4FD1AF-D7F8-9D34-9ADA-B4A71919341F}"/>
+              </a:ext>
+            </a:extLst>
+          </p:cNvPr>
+          <p:cNvSpPr/>
+          <p:nvPr/>
+        </p:nvSpPr>
+        <p:spPr>
+          <a:xfrm>
+            <a:off x="3868489" y="4269728"/>
+            <a:ext cx="4722763" cy="680442"/>
+          </a:xfrm>
+          <a:prstGeom prst="rect">
+            <a:avLst/>
+          </a:prstGeom>
+          <a:noFill/>
+          <a:ln/>
+        </p:spPr>
+        <p:txBody>
+          <a:bodyPr wrap="square" lIns="0" tIns="0" rIns="0" bIns="0" rtlCol="0" anchor="t">
+            <a:normAutofit/>
+          </a:bodyPr>
+          <a:lstStyle/>
+          <a:p>
+            <a:pPr marL="0" indent="0" algn="l">
+              <a:lnSpc>
+                <a:spcPct val="133000"/>
+              </a:lnSpc>
+              <a:buNone/>
+            </a:pPr>
+            <a:r>
+              <a:rPr lang="en-US" sz="1100" dirty="0">
+                <a:solidFill>
+                  <a:srgbClr val="272525"/>
+                </a:solidFill>
+                <a:latin typeface="Lato" pitchFamily="34" charset="0"/>
+                <a:ea typeface="Lato" pitchFamily="34" charset="-122"/>
+                <a:cs typeface="Lato" pitchFamily="34" charset="-120"/>
+              </a:rPr>
+              <a:t>Aline Meireles | Susana Sousa</a:t>
+            </a:r>
+            <a:endParaRPr lang="en-US" sz="1100" dirty="0"/>
           </a:p>
         </p:txBody>
       </p:sp>
@@ -3486,7 +3558,29 @@
                 <a:ea typeface="Gelasio" pitchFamily="34" charset="-122"/>
                 <a:cs typeface="Gelasio" pitchFamily="34" charset="-120"/>
               </a:rPr>
-              <a:t>Etapa 5: Asseguração da Qualidade</a:t>
+              <a:t>Etapa 5: </a:t>
+            </a:r>
+            <a:r>
+              <a:rPr lang="en-US" sz="2350" dirty="0" err="1">
+                <a:solidFill>
+                  <a:srgbClr val="312F2B"/>
+                </a:solidFill>
+                <a:latin typeface="Gelasio" pitchFamily="34" charset="0"/>
+                <a:ea typeface="Gelasio" pitchFamily="34" charset="-122"/>
+                <a:cs typeface="Gelasio" pitchFamily="34" charset="-120"/>
+              </a:rPr>
+              <a:t>Asseguramento</a:t>
+            </a:r>
+            <a:r>
+              <a:rPr lang="en-US" sz="2350" dirty="0">
+                <a:solidFill>
+                  <a:srgbClr val="312F2B"/>
+                </a:solidFill>
+                <a:latin typeface="Gelasio" pitchFamily="34" charset="0"/>
+                <a:ea typeface="Gelasio" pitchFamily="34" charset="-122"/>
+                <a:cs typeface="Gelasio" pitchFamily="34" charset="-120"/>
+              </a:rPr>
+              <a:t> da Qualidade</a:t>
             </a:r>
             <a:endParaRPr lang="en-US" sz="2350" dirty="0"/>
           </a:p>
@@ -6027,6 +6121,61 @@
           <a:p>
             <a:pPr algn="ctr"/>
             <a:endParaRPr lang="pt-PT"/>
+          </a:p>
+        </p:txBody>
+      </p:sp>
+      <p:sp>
+        <p:nvSpPr>
+          <p:cNvPr id="4" name="CaixaDeTexto 3">
+            <a:extLst>
+              <a:ext uri="{FF2B5EF4-FFF2-40B4-BE49-F238E27FC236}">
+                <a16:creationId xmlns:a16="http://schemas.microsoft.com/office/drawing/2014/main" id="{3862B2A4-87D1-8FF2-618C-347B181E86B7}"/>
+              </a:ext>
+            </a:extLst>
+          </p:cNvPr>
+          <p:cNvSpPr txBox="1"/>
+          <p:nvPr/>
+        </p:nvSpPr>
+        <p:spPr>
+          <a:xfrm>
+            <a:off x="1109666" y="4255420"/>
+            <a:ext cx="6592396" cy="294183"/>
+          </a:xfrm>
+          <a:prstGeom prst="rect">
+            <a:avLst/>
+          </a:prstGeom>
+          <a:noFill/>
+        </p:spPr>
+        <p:txBody>
+          <a:bodyPr wrap="square">
+            <a:spAutoFit/>
+          </a:bodyPr>
+          <a:lstStyle/>
+          <a:p>
+            <a:pPr>
+              <a:lnSpc>
+                <a:spcPct val="115000"/>
+              </a:lnSpc>
+              <a:spcAft>
+                <a:spcPts val="800"/>
+              </a:spcAft>
+              <a:buNone/>
+            </a:pPr>
+            <a:r>
+              <a:rPr lang="en-US" sz="1200" kern="100" dirty="0">
+                <a:effectLst/>
+                <a:latin typeface="Aptos" panose="020B0004020202020204" pitchFamily="34" charset="0"/>
+                <a:ea typeface="Aptos" panose="020B0004020202020204" pitchFamily="34" charset="0"/>
+                <a:cs typeface="Times New Roman" panose="02020603050405020304" pitchFamily="18" charset="0"/>
+              </a:rPr>
+              <a:t>C:\Projetos\manufacturing-performance-analytics\power_bi\dashboard_operations.pbip</a:t>
+            </a:r>
+            <a:endParaRPr lang="pt-PT" sz="1200" kern="100" dirty="0">
+              <a:effectLst/>
+              <a:latin typeface="Aptos" panose="020B0004020202020204" pitchFamily="34" charset="0"/>
+              <a:ea typeface="Aptos" panose="020B0004020202020204" pitchFamily="34" charset="0"/>
+              <a:cs typeface="Times New Roman" panose="02020603050405020304" pitchFamily="18" charset="0"/>
+            </a:endParaRPr>
           </a:p>
         </p:txBody>
       </p:sp>
